--- a/Litter Detection V2.pptx
+++ b/Litter Detection V2.pptx
@@ -1160,28 +1160,168 @@
           <a:lstStyle/>
           <a:p>
             <a:r>
-              <a:t>Model besser machen gerade für unschärfe</a:t>
-            </a:r>
-          </a:p>
-          <a:p>
-            <a:r>
-              <a:t>Tiefenwerte nehmen für positionsbestimmung Müll</a:t>
-            </a:r>
-          </a:p>
-          <a:p>
-            <a:r>
-              <a:t>Hund Schaut in richtung müll wenn emote</a:t>
-            </a:r>
-          </a:p>
-          <a:p>
-            <a:r>
-              <a:t>Obsticale avoidence damit hund net über müll läuft</a:t>
-            </a:r>
-          </a:p>
-          <a:p>
-            <a:r>
-              <a:t>Mehr testen was für validierungsmodel passt</a:t>
-            </a:r>
+              <a:rPr dirty="0"/>
+              <a:t>Model </a:t>
+            </a:r>
+            <a:r>
+              <a:rPr dirty="0" err="1"/>
+              <a:t>besser</a:t>
+            </a:r>
+            <a:r>
+              <a:rPr dirty="0"/>
+              <a:t> </a:t>
+            </a:r>
+            <a:r>
+              <a:rPr dirty="0" err="1"/>
+              <a:t>machen</a:t>
+            </a:r>
+            <a:r>
+              <a:rPr dirty="0"/>
+              <a:t> </a:t>
+            </a:r>
+            <a:r>
+              <a:rPr dirty="0" err="1"/>
+              <a:t>gerade</a:t>
+            </a:r>
+            <a:r>
+              <a:rPr dirty="0"/>
+              <a:t> für </a:t>
+            </a:r>
+            <a:r>
+              <a:rPr dirty="0" err="1"/>
+              <a:t>unschärfe</a:t>
+            </a:r>
+            <a:endParaRPr dirty="0"/>
+          </a:p>
+          <a:p>
+            <a:r>
+              <a:rPr dirty="0" err="1"/>
+              <a:t>Tiefenwerte</a:t>
+            </a:r>
+            <a:r>
+              <a:rPr dirty="0"/>
+              <a:t> </a:t>
+            </a:r>
+            <a:r>
+              <a:rPr dirty="0" err="1"/>
+              <a:t>nehmen</a:t>
+            </a:r>
+            <a:r>
+              <a:rPr dirty="0"/>
+              <a:t> für </a:t>
+            </a:r>
+            <a:r>
+              <a:rPr dirty="0" err="1"/>
+              <a:t>positionsbestimmung</a:t>
+            </a:r>
+            <a:r>
+              <a:rPr dirty="0"/>
+              <a:t> Müll</a:t>
+            </a:r>
+          </a:p>
+          <a:p>
+            <a:r>
+              <a:rPr dirty="0"/>
+              <a:t>Hund Schaut in </a:t>
+            </a:r>
+            <a:r>
+              <a:rPr dirty="0" err="1"/>
+              <a:t>richtung</a:t>
+            </a:r>
+            <a:r>
+              <a:rPr dirty="0"/>
+              <a:t> </a:t>
+            </a:r>
+            <a:r>
+              <a:rPr dirty="0" err="1"/>
+              <a:t>müll</a:t>
+            </a:r>
+            <a:r>
+              <a:rPr dirty="0"/>
+              <a:t> </a:t>
+            </a:r>
+            <a:r>
+              <a:rPr dirty="0" err="1"/>
+              <a:t>wenn</a:t>
+            </a:r>
+            <a:r>
+              <a:rPr dirty="0"/>
+              <a:t> emote</a:t>
+            </a:r>
+          </a:p>
+          <a:p>
+            <a:r>
+              <a:rPr dirty="0" err="1"/>
+              <a:t>Obsticale</a:t>
+            </a:r>
+            <a:r>
+              <a:rPr dirty="0"/>
+              <a:t> </a:t>
+            </a:r>
+            <a:r>
+              <a:rPr dirty="0" err="1"/>
+              <a:t>avoidence</a:t>
+            </a:r>
+            <a:r>
+              <a:rPr dirty="0"/>
+              <a:t> </a:t>
+            </a:r>
+            <a:r>
+              <a:rPr dirty="0" err="1"/>
+              <a:t>damit</a:t>
+            </a:r>
+            <a:r>
+              <a:rPr dirty="0"/>
+              <a:t> hund net </a:t>
+            </a:r>
+            <a:r>
+              <a:rPr dirty="0" err="1"/>
+              <a:t>über</a:t>
+            </a:r>
+            <a:r>
+              <a:rPr dirty="0"/>
+              <a:t> </a:t>
+            </a:r>
+            <a:r>
+              <a:rPr dirty="0" err="1"/>
+              <a:t>müll</a:t>
+            </a:r>
+            <a:r>
+              <a:rPr dirty="0"/>
+              <a:t> </a:t>
+            </a:r>
+            <a:r>
+              <a:rPr dirty="0" err="1"/>
+              <a:t>läuft</a:t>
+            </a:r>
+            <a:endParaRPr dirty="0"/>
+          </a:p>
+          <a:p>
+            <a:r>
+              <a:rPr dirty="0"/>
+              <a:t>Mehr </a:t>
+            </a:r>
+            <a:r>
+              <a:rPr dirty="0" err="1"/>
+              <a:t>testen</a:t>
+            </a:r>
+            <a:r>
+              <a:rPr dirty="0"/>
+              <a:t> was für </a:t>
+            </a:r>
+            <a:r>
+              <a:rPr dirty="0" err="1"/>
+              <a:t>validierungsmodel</a:t>
+            </a:r>
+            <a:r>
+              <a:rPr dirty="0"/>
+              <a:t> </a:t>
+            </a:r>
+            <a:r>
+              <a:rPr dirty="0" err="1"/>
+              <a:t>passt</a:t>
+            </a:r>
+            <a:endParaRPr dirty="0"/>
           </a:p>
         </p:txBody>
       </p:sp>
@@ -14391,11 +14531,15 @@
             </a:r>
             <a:r>
               <a:rPr sz="1800" dirty="0"/>
-              <a:t> </a:t>
+              <a:t> M</a:t>
+            </a:r>
+            <a:r>
+              <a:rPr lang="de-DE" sz="1800" dirty="0"/>
+              <a:t>ü</a:t>
             </a:r>
             <a:r>
               <a:rPr sz="1800" dirty="0" err="1"/>
-              <a:t>Müll</a:t>
+              <a:t>ll</a:t>
             </a:r>
             <a:r>
               <a:rPr sz="1800" dirty="0"/>
@@ -15851,25 +15995,19 @@
           <a:p>
             <a:r>
               <a:rPr lang="de-DE" sz="2000" dirty="0"/>
-              <a:t>KI wurde viel für das Programmieren verwendet</a:t>
+              <a:t>Nicht alle Agenten sind zwingend sinnvoll gewesen</a:t>
             </a:r>
           </a:p>
           <a:p>
             <a:r>
               <a:rPr lang="de-DE" sz="2000" dirty="0"/>
-              <a:t>Nicht alle Agenten sind zwingend sinnvoll gewesen</a:t>
+              <a:t>Mangelnde Genauigkeit in den Prompts hat zu Ineffizienten geführt</a:t>
             </a:r>
           </a:p>
           <a:p>
             <a:r>
               <a:rPr lang="de-DE" sz="2000" dirty="0"/>
-              <a:t>Mangelnde Genauigkeit in den Prompts hat zu Ineffizientes geführt</a:t>
-            </a:r>
-          </a:p>
-          <a:p>
-            <a:r>
-              <a:rPr lang="de-DE" sz="2000" dirty="0"/>
-              <a:t>Bei ausführlichen Prompts wurden die aufgaben gut erledigt</a:t>
+              <a:t>Bei ausführlichen Prompts wurden die Aufgaben gut erledigt</a:t>
             </a:r>
           </a:p>
           <a:p>
@@ -15978,8 +16116,54 @@
               <a:t>, </a:t>
             </a:r>
             <a:r>
+              <a:rPr lang="de-DE" sz="2000" dirty="0"/>
+              <a:t>nachtrainieren auf Unschärfe, Trainingsdaten erweitern auf häufige Fehldetektionen (z.B.  Schuhe)</a:t>
+            </a:r>
+            <a:endParaRPr lang="de-DE" dirty="0"/>
+          </a:p>
+          <a:p>
+            <a:r>
               <a:rPr sz="2000" dirty="0" err="1"/>
-              <a:t>v.a.</a:t>
+              <a:t>Tiefenwerte</a:t>
+            </a:r>
+            <a:r>
+              <a:rPr sz="2000" dirty="0"/>
+              <a:t> f</a:t>
+            </a:r>
+            <a:r>
+              <a:rPr lang="de-DE" sz="2000" dirty="0"/>
+              <a:t>ü</a:t>
+            </a:r>
+            <a:r>
+              <a:rPr sz="2000" dirty="0"/>
+              <a:t>r </a:t>
+            </a:r>
+            <a:r>
+              <a:rPr sz="2000" dirty="0" err="1"/>
+              <a:t>genauere</a:t>
+            </a:r>
+            <a:r>
+              <a:rPr sz="2000" dirty="0"/>
+              <a:t> M</a:t>
+            </a:r>
+            <a:r>
+              <a:rPr lang="de-DE" sz="2000" dirty="0"/>
+              <a:t>ü</a:t>
+            </a:r>
+            <a:r>
+              <a:rPr sz="2000" dirty="0" err="1"/>
+              <a:t>ll-Positionsbestimmung</a:t>
+            </a:r>
+            <a:endParaRPr sz="2000" dirty="0"/>
+          </a:p>
+          <a:p>
+            <a:r>
+              <a:rPr sz="2000" dirty="0"/>
+              <a:t>Hund </a:t>
+            </a:r>
+            <a:r>
+              <a:rPr sz="2000" dirty="0" err="1"/>
+              <a:t>schaut</a:t>
             </a:r>
             <a:r>
               <a:rPr sz="2000" dirty="0"/>
@@ -15987,7 +16171,15 @@
             </a:r>
             <a:r>
               <a:rPr sz="2000" dirty="0" err="1"/>
-              <a:t>bei</a:t>
+              <a:t>beim</a:t>
+            </a:r>
+            <a:r>
+              <a:rPr sz="2000" dirty="0"/>
+              <a:t> Emote in </a:t>
+            </a:r>
+            <a:r>
+              <a:rPr sz="2000" dirty="0" err="1"/>
+              <a:t>Richtung</a:t>
             </a:r>
             <a:r>
               <a:rPr sz="2000" dirty="0"/>
@@ -15995,96 +16187,40 @@
             </a:r>
             <a:r>
               <a:rPr sz="2000" dirty="0" err="1"/>
-              <a:t>Unschärfe</a:t>
-            </a:r>
-            <a:endParaRPr lang="de-DE" dirty="0"/>
-          </a:p>
-          <a:p>
+              <a:t>Müll</a:t>
+            </a:r>
+            <a:endParaRPr sz="2000" dirty="0"/>
+          </a:p>
+          <a:p>
+            <a:r>
+              <a:rPr sz="2000" dirty="0"/>
+              <a:t>Obstacle-Avoidance </a:t>
+            </a:r>
+            <a:r>
+              <a:rPr lang="de-DE" sz="2000" dirty="0"/>
+              <a:t>einbauen</a:t>
+            </a:r>
+          </a:p>
+          <a:p>
+            <a:r>
+              <a:rPr lang="de-DE" sz="2000" dirty="0"/>
+              <a:t>B</a:t>
+            </a:r>
             <a:r>
               <a:rPr sz="2000" dirty="0" err="1"/>
-              <a:t>Tiefenwerte</a:t>
-            </a:r>
-            <a:r>
-              <a:rPr sz="2000" dirty="0"/>
+              <a:t>essere</a:t>
+            </a:r>
+            <a:r>
+              <a:rPr lang="de-DE" sz="2000" dirty="0"/>
               <a:t> </a:t>
             </a:r>
             <a:r>
-              <a:rPr sz="2000" dirty="0" err="1"/>
-              <a:t>für</a:t>
-            </a:r>
-            <a:r>
-              <a:rPr sz="2000" dirty="0"/>
-              <a:t> </a:t>
-            </a:r>
-            <a:r>
-              <a:rPr sz="2000" dirty="0" err="1"/>
-              <a:t>genauere</a:t>
-            </a:r>
-            <a:r>
-              <a:rPr sz="2000" dirty="0"/>
-              <a:t> Mu</a:t>
+              <a:rPr lang="de-DE" sz="2000" dirty="0" err="1"/>
+              <a:t>Ollama</a:t>
             </a:r>
             <a:r>
               <a:rPr lang="de-DE" sz="2000" dirty="0"/>
-              <a:t>ü</a:t>
-            </a:r>
-            <a:r>
-              <a:rPr sz="2000" dirty="0" err="1"/>
-              <a:t>ll-Positionsbestimmung</a:t>
-            </a:r>
-            <a:endParaRPr sz="2000" dirty="0"/>
-          </a:p>
-          <a:p>
-            <a:r>
-              <a:rPr sz="2000" dirty="0"/>
-              <a:t>Hund </a:t>
-            </a:r>
-            <a:r>
-              <a:rPr sz="2000" dirty="0" err="1"/>
-              <a:t>schaut</a:t>
-            </a:r>
-            <a:r>
-              <a:rPr sz="2000" dirty="0"/>
-              <a:t> </a:t>
-            </a:r>
-            <a:r>
-              <a:rPr sz="2000" dirty="0" err="1"/>
-              <a:t>beim</a:t>
-            </a:r>
-            <a:r>
-              <a:rPr sz="2000" dirty="0"/>
-              <a:t> Emote in </a:t>
-            </a:r>
-            <a:r>
-              <a:rPr sz="2000" dirty="0" err="1"/>
-              <a:t>Richtung</a:t>
-            </a:r>
-            <a:r>
-              <a:rPr sz="2000" dirty="0"/>
-              <a:t> </a:t>
-            </a:r>
-            <a:r>
-              <a:rPr sz="2000" dirty="0" err="1"/>
-              <a:t>Müll</a:t>
-            </a:r>
-            <a:endParaRPr sz="2000" dirty="0"/>
-          </a:p>
-          <a:p>
-            <a:r>
-              <a:rPr sz="2000" dirty="0"/>
-              <a:t>Obstacle-Avoidance + </a:t>
-            </a:r>
-            <a:r>
-              <a:rPr sz="2000" dirty="0" err="1"/>
-              <a:t>besseres</a:t>
-            </a:r>
-            <a:r>
-              <a:rPr sz="2000" dirty="0"/>
-              <a:t> </a:t>
-            </a:r>
-            <a:r>
-              <a:rPr sz="2000" dirty="0" err="1"/>
-              <a:t>Validierungsmodell</a:t>
+              <a:t> Modelle</a:t>
             </a:r>
             <a:endParaRPr sz="2000" dirty="0"/>
           </a:p>
@@ -17700,7 +17836,7 @@
           <a:p>
             <a:r>
               <a:rPr sz="1800" dirty="0"/>
-              <a:t>Experiment-Tracking </a:t>
+              <a:t>Tracking </a:t>
             </a:r>
             <a:r>
               <a:rPr sz="1800" dirty="0" err="1"/>
@@ -19490,7 +19626,7 @@
             </a:solidFill>
             <a:ln w="15875">
               <a:solidFill>
-                <a:srgbClr val="B4500E"/>
+                <a:srgbClr val="2D4C7E"/>
               </a:solidFill>
             </a:ln>
             <a:effectLst/>
@@ -19515,7 +19651,7 @@
             <a:p>
               <a:pPr algn="ctr"/>
               <a:r>
-                <a:rPr sz="1300" b="1">
+                <a:rPr sz="1300" b="1" dirty="0">
                   <a:solidFill>
                     <a:srgbClr val="FFFFFF"/>
                   </a:solidFill>
@@ -19526,13 +19662,34 @@
             <a:p>
               <a:pPr algn="ctr"/>
               <a:r>
-                <a:rPr sz="1100" b="0">
+                <a:rPr sz="1100" b="0" dirty="0" err="1">
                   <a:solidFill>
                     <a:srgbClr val="FFFFFF"/>
                   </a:solidFill>
                 </a:rPr>
-                <a:t>Pfad abfahren</a:t>
+                <a:t>Pfad</a:t>
               </a:r>
+              <a:r>
+                <a:rPr sz="1100" b="0" dirty="0">
+                  <a:solidFill>
+                    <a:srgbClr val="FFFFFF"/>
+                  </a:solidFill>
+                </a:rPr>
+                <a:t> </a:t>
+              </a:r>
+              <a:r>
+                <a:rPr sz="1100" b="0" dirty="0" err="1">
+                  <a:solidFill>
+                    <a:srgbClr val="FFFFFF"/>
+                  </a:solidFill>
+                </a:rPr>
+                <a:t>abfahren</a:t>
+              </a:r>
+              <a:endParaRPr sz="1100" b="0" dirty="0">
+                <a:solidFill>
+                  <a:srgbClr val="FFFFFF"/>
+                </a:solidFill>
+              </a:endParaRPr>
             </a:p>
           </p:txBody>
         </p:sp>
@@ -20685,7 +20842,7 @@
         </p:spPr>
         <p:txBody>
           <a:bodyPr wrap="square">
-            <a:normAutofit fontScale="92500" lnSpcReduction="10000"/>
+            <a:normAutofit/>
           </a:bodyPr>
           <a:lstStyle/>
           <a:p>
@@ -20697,12 +20854,9 @@
               <a:rPr lang="de-DE" sz="1800" dirty="0" err="1"/>
               <a:t>gecropped</a:t>
             </a:r>
-            <a:endParaRPr lang="de-DE" sz="1800" dirty="0"/>
-          </a:p>
-          <a:p>
             <a:r>
               <a:rPr lang="de-DE" sz="1800" dirty="0"/>
-              <a:t>Validierung über KI-Agenten mit </a:t>
+              <a:t> und über KI-Agenten mit </a:t>
             </a:r>
             <a:r>
               <a:rPr lang="de-DE" sz="1800" dirty="0" err="1"/>
@@ -20710,7 +20864,7 @@
             </a:r>
             <a:r>
               <a:rPr lang="de-DE" sz="1800" dirty="0"/>
-              <a:t> ()</a:t>
+              <a:t> (llava-phi3) validiert</a:t>
             </a:r>
           </a:p>
           <a:p>
@@ -21095,7 +21249,7 @@
             </a:solidFill>
             <a:ln w="15875">
               <a:solidFill>
-                <a:srgbClr val="B4500E"/>
+                <a:srgbClr val="2D4C7E"/>
               </a:solidFill>
             </a:ln>
             <a:effectLst/>
@@ -21120,7 +21274,7 @@
             <a:p>
               <a:pPr algn="ctr"/>
               <a:r>
-                <a:rPr sz="1300" b="1">
+                <a:rPr sz="1300" b="1" dirty="0">
                   <a:solidFill>
                     <a:srgbClr val="FFFFFF"/>
                   </a:solidFill>
@@ -21131,13 +21285,34 @@
             <a:p>
               <a:pPr algn="ctr"/>
               <a:r>
-                <a:rPr sz="1100" b="0">
+                <a:rPr sz="1100" b="0" dirty="0" err="1">
                   <a:solidFill>
                     <a:srgbClr val="FFFFFF"/>
                   </a:solidFill>
                 </a:rPr>
-                <a:t>Detektion + Validierung</a:t>
+                <a:t>Detektion</a:t>
               </a:r>
+              <a:r>
+                <a:rPr sz="1100" b="0" dirty="0">
+                  <a:solidFill>
+                    <a:srgbClr val="FFFFFF"/>
+                  </a:solidFill>
+                </a:rPr>
+                <a:t> + </a:t>
+              </a:r>
+              <a:r>
+                <a:rPr sz="1100" b="0" dirty="0" err="1">
+                  <a:solidFill>
+                    <a:srgbClr val="FFFFFF"/>
+                  </a:solidFill>
+                </a:rPr>
+                <a:t>Validierung</a:t>
+              </a:r>
+              <a:endParaRPr sz="1100" b="0" dirty="0">
+                <a:solidFill>
+                  <a:srgbClr val="FFFFFF"/>
+                </a:solidFill>
+              </a:endParaRPr>
             </a:p>
           </p:txBody>
         </p:sp>
